--- a/courses/build/teach-the-teachers/T-D4.pptx
+++ b/courses/build/teach-the-teachers/T-D4.pptx
@@ -4767,7 +4767,7 @@
     <p:bg>
       <p:bgPr>
         <a:solidFill>
-          <a:srgbClr val="1F4D2B"/>
+          <a:srgbClr val="2F3A33"/>
         </a:solidFill>
         <a:effectLst/>
       </p:bgPr>
@@ -4809,9 +4809,9 @@
             <a:r>
               <a:rPr sz="1000" b="0">
                 <a:solidFill>
-                  <a:srgbClr val="A8D88A"/>
-                </a:solidFill>
-                <a:latin typeface="Arial"/>
+                  <a:srgbClr val="F2EFE6"/>
+                </a:solidFill>
+                <a:latin typeface="Trebuchet MS"/>
               </a:rPr>
               <a:t>T-D4-01   ·   Poster T-P11</a:t>
             </a:r>
@@ -4848,9 +4848,9 @@
             <a:r>
               <a:rPr sz="1000" b="0">
                 <a:solidFill>
-                  <a:srgbClr val="A8D88A"/>
-                </a:solidFill>
-                <a:latin typeface="Arial"/>
+                  <a:srgbClr val="F2EFE6"/>
+                </a:solidFill>
+                <a:latin typeface="Trebuchet MS"/>
               </a:rPr>
               <a:t>Teach the Teachers</a:t>
             </a:r>
@@ -4887,9 +4887,9 @@
             <a:r>
               <a:rPr sz="4800" b="1">
                 <a:solidFill>
-                  <a:srgbClr val="F7F2E9"/>
-                </a:solidFill>
-                <a:latin typeface="Georgia"/>
+                  <a:srgbClr val="F2EFE6"/>
+                </a:solidFill>
+                <a:latin typeface="Segoe Print"/>
               </a:rPr>
               <a:t>Day 4</a:t>
             </a:r>
@@ -4911,7 +4911,7 @@
             <a:avLst/>
           </a:prstGeom>
           <a:solidFill>
-            <a:srgbClr val="C07A1E"/>
+            <a:srgbClr val="D2452C"/>
           </a:solidFill>
           <a:ln>
             <a:noFill/>
@@ -4970,9 +4970,9 @@
             <a:r>
               <a:rPr sz="2400" b="0">
                 <a:solidFill>
-                  <a:srgbClr val="A8D88A"/>
-                </a:solidFill>
-                <a:latin typeface="Arial"/>
+                  <a:srgbClr val="F2EFE6"/>
+                </a:solidFill>
+                <a:latin typeface="Trebuchet MS"/>
               </a:rPr>
               <a:t>Many ways in</a:t>
             </a:r>
@@ -4986,9 +4986,9 @@
             <a:r>
               <a:rPr sz="2400" b="0">
                 <a:solidFill>
-                  <a:srgbClr val="A8D88A"/>
-                </a:solidFill>
-                <a:latin typeface="Arial"/>
+                  <a:srgbClr val="F2EFE6"/>
+                </a:solidFill>
+                <a:latin typeface="Trebuchet MS"/>
               </a:rPr>
               <a:t>Day 4 of 5</a:t>
             </a:r>
@@ -5010,11 +5010,11 @@
             <a:avLst/>
           </a:prstGeom>
           <a:solidFill>
-            <a:srgbClr val="FBF6EC"/>
+            <a:srgbClr val="C9A77C"/>
           </a:solidFill>
           <a:ln w="15875">
             <a:solidFill>
-              <a:srgbClr val="E2D8C4"/>
+              <a:srgbClr val="2C6FB7"/>
             </a:solidFill>
           </a:ln>
           <a:effectLst/>
@@ -5071,9 +5071,9 @@
             <a:r>
               <a:rPr sz="1200" b="1">
                 <a:solidFill>
-                  <a:srgbClr val="C07A1E"/>
-                </a:solidFill>
-                <a:latin typeface="Arial"/>
+                  <a:srgbClr val="D2452C"/>
+                </a:solidFill>
+                <a:latin typeface="Trebuchet MS"/>
               </a:rPr>
               <a:t>IMAGE · T-IMG-09 · coming</a:t>
             </a:r>
@@ -5110,9 +5110,9 @@
             <a:r>
               <a:rPr sz="1800" b="1">
                 <a:solidFill>
-                  <a:srgbClr val="1F4D2B"/>
-                </a:solidFill>
-                <a:latin typeface="Georgia"/>
+                  <a:srgbClr val="1C1C1C"/>
+                </a:solidFill>
+                <a:latin typeface="Segoe Print"/>
               </a:rPr>
               <a:t>A gallery walk</a:t>
             </a:r>
@@ -5149,9 +5149,9 @@
             <a:r>
               <a:rPr sz="1100" b="0">
                 <a:solidFill>
-                  <a:srgbClr val="20190F"/>
-                </a:solidFill>
-                <a:latin typeface="Arial"/>
+                  <a:srgbClr val="1C1C1C"/>
+                </a:solidFill>
+                <a:latin typeface="Trebuchet MS"/>
               </a:rPr>
               <a:t>An outdoor space with six stations along a fence and two walls, each with a poster (simple shapes) and a small table of objects: seed trays, string, jars, seed packets, insect picture cards. Four small groups are each busy at a different station — sowing, measuring with string, sorting cards. A facilitator rings a small hand bell near the middle.…</a:t>
             </a:r>
@@ -5172,7 +5172,7 @@
     <p:bg>
       <p:bgPr>
         <a:solidFill>
-          <a:srgbClr val="F7F2E9"/>
+          <a:srgbClr val="C9A77C"/>
         </a:solidFill>
         <a:effectLst/>
       </p:bgPr>
@@ -5214,9 +5214,9 @@
             <a:r>
               <a:rPr sz="1000" b="0">
                 <a:solidFill>
-                  <a:srgbClr val="6B6255"/>
-                </a:solidFill>
-                <a:latin typeface="Arial"/>
+                  <a:srgbClr val="1C1C1C"/>
+                </a:solidFill>
+                <a:latin typeface="Trebuchet MS"/>
               </a:rPr>
               <a:t>T-D4-10   ·   Poster F-P18</a:t>
             </a:r>
@@ -5253,9 +5253,9 @@
             <a:r>
               <a:rPr sz="1000" b="0">
                 <a:solidFill>
-                  <a:srgbClr val="6B6255"/>
-                </a:solidFill>
-                <a:latin typeface="Arial"/>
+                  <a:srgbClr val="1C1C1C"/>
+                </a:solidFill>
+                <a:latin typeface="Trebuchet MS"/>
               </a:rPr>
               <a:t>Teach the Teachers</a:t>
             </a:r>
@@ -5292,9 +5292,9 @@
             <a:r>
               <a:rPr sz="3800" b="1">
                 <a:solidFill>
-                  <a:srgbClr val="1F4D2B"/>
-                </a:solidFill>
-                <a:latin typeface="Georgia"/>
+                  <a:srgbClr val="1C1C1C"/>
+                </a:solidFill>
+                <a:latin typeface="Segoe Print"/>
               </a:rPr>
               <a:t>Step out: unpack</a:t>
             </a:r>
@@ -5316,7 +5316,7 @@
             <a:avLst/>
           </a:prstGeom>
           <a:solidFill>
-            <a:srgbClr val="E2D8C4"/>
+            <a:srgbClr val="2C6FB7"/>
           </a:solidFill>
           <a:ln>
             <a:noFill/>
@@ -5375,9 +5375,9 @@
             <a:r>
               <a:rPr sz="2800" b="0">
                 <a:solidFill>
-                  <a:srgbClr val="20190F"/>
-                </a:solidFill>
-                <a:latin typeface="Arial"/>
+                  <a:srgbClr val="1C1C1C"/>
+                </a:solidFill>
+                <a:latin typeface="Trebuchet MS"/>
               </a:rPr>
               <a:t>•  What made the walk work?</a:t>
             </a:r>
@@ -5391,9 +5391,9 @@
             <a:r>
               <a:rPr sz="2800" b="0">
                 <a:solidFill>
-                  <a:srgbClr val="20190F"/>
-                </a:solidFill>
-                <a:latin typeface="Arial"/>
+                  <a:srgbClr val="1C1C1C"/>
+                </a:solidFill>
+                <a:latin typeface="Trebuchet MS"/>
               </a:rPr>
               <a:t>•  When will you use it?</a:t>
             </a:r>
@@ -5439,7 +5439,7 @@
             <a:avLst/>
           </a:prstGeom>
           <a:solidFill>
-            <a:srgbClr val="20190F"/>
+            <a:srgbClr val="1C1C1C"/>
           </a:solidFill>
           <a:ln>
             <a:noFill/>
@@ -5498,9 +5498,9 @@
             <a:r>
               <a:rPr sz="1100" b="0">
                 <a:solidFill>
-                  <a:srgbClr val="F7F2E9"/>
-                </a:solidFill>
-                <a:latin typeface="Arial"/>
+                  <a:srgbClr val="C9A77C"/>
+                </a:solidFill>
+                <a:latin typeface="Trebuchet MS"/>
               </a:rPr>
               <a:t>▶  Clip T-ANI-21 · play from the tablet: seed-dry-processing.mp4</a:t>
             </a:r>
@@ -5521,7 +5521,7 @@
     <p:bg>
       <p:bgPr>
         <a:solidFill>
-          <a:srgbClr val="1F4D2B"/>
+          <a:srgbClr val="2F3A33"/>
         </a:solidFill>
         <a:effectLst/>
       </p:bgPr>
@@ -5563,9 +5563,9 @@
             <a:r>
               <a:rPr sz="1000" b="0">
                 <a:solidFill>
-                  <a:srgbClr val="A8D88A"/>
-                </a:solidFill>
-                <a:latin typeface="Arial"/>
+                  <a:srgbClr val="F2EFE6"/>
+                </a:solidFill>
+                <a:latin typeface="Trebuchet MS"/>
               </a:rPr>
               <a:t>T-D4-11   ·   Poster T-P13</a:t>
             </a:r>
@@ -5602,9 +5602,9 @@
             <a:r>
               <a:rPr sz="1000" b="0">
                 <a:solidFill>
-                  <a:srgbClr val="A8D88A"/>
-                </a:solidFill>
-                <a:latin typeface="Arial"/>
+                  <a:srgbClr val="F2EFE6"/>
+                </a:solidFill>
+                <a:latin typeface="Trebuchet MS"/>
               </a:rPr>
               <a:t>Teach the Teachers</a:t>
             </a:r>
@@ -5641,9 +5641,9 @@
             <a:r>
               <a:rPr sz="4800" b="1">
                 <a:solidFill>
-                  <a:srgbClr val="F7F2E9"/>
-                </a:solidFill>
-                <a:latin typeface="Georgia"/>
+                  <a:srgbClr val="F2EFE6"/>
+                </a:solidFill>
+                <a:latin typeface="Segoe Print"/>
               </a:rPr>
               <a:t>Mode 3: the app</a:t>
             </a:r>
@@ -5665,7 +5665,7 @@
             <a:avLst/>
           </a:prstGeom>
           <a:solidFill>
-            <a:srgbClr val="C07A1E"/>
+            <a:srgbClr val="D2452C"/>
           </a:solidFill>
           <a:ln>
             <a:noFill/>
@@ -5724,9 +5724,9 @@
             <a:r>
               <a:rPr sz="2400" b="0">
                 <a:solidFill>
-                  <a:srgbClr val="A8D88A"/>
-                </a:solidFill>
-                <a:latin typeface="Arial"/>
+                  <a:srgbClr val="F2EFE6"/>
+                </a:solidFill>
+                <a:latin typeface="Trebuchet MS"/>
               </a:rPr>
               <a:t>Show · Record · Ask and look</a:t>
             </a:r>
@@ -5748,11 +5748,11 @@
             <a:avLst/>
           </a:prstGeom>
           <a:solidFill>
-            <a:srgbClr val="FBF6EC"/>
+            <a:srgbClr val="C9A77C"/>
           </a:solidFill>
           <a:ln w="15875">
             <a:solidFill>
-              <a:srgbClr val="E2D8C4"/>
+              <a:srgbClr val="2C6FB7"/>
             </a:solidFill>
           </a:ln>
           <a:effectLst/>
@@ -5809,9 +5809,9 @@
             <a:r>
               <a:rPr sz="1200" b="1">
                 <a:solidFill>
-                  <a:srgbClr val="C07A1E"/>
-                </a:solidFill>
-                <a:latin typeface="Arial"/>
+                  <a:srgbClr val="D2452C"/>
+                </a:solidFill>
+                <a:latin typeface="Trebuchet MS"/>
               </a:rPr>
               <a:t>POSTER ART · T-P13-ART · coming</a:t>
             </a:r>
@@ -5848,9 +5848,9 @@
             <a:r>
               <a:rPr sz="1800" b="1">
                 <a:solidFill>
-                  <a:srgbClr val="1F4D2B"/>
-                </a:solidFill>
-                <a:latin typeface="Georgia"/>
+                  <a:srgbClr val="1C1C1C"/>
+                </a:solidFill>
+                <a:latin typeface="Segoe Print"/>
               </a:rPr>
               <a:t>Artwork for T-P13 · One lesson, three ways</a:t>
             </a:r>
@@ -5887,9 +5887,9 @@
             <a:r>
               <a:rPr sz="1100" b="0">
                 <a:solidFill>
-                  <a:srgbClr val="20190F"/>
-                </a:solidFill>
-                <a:latin typeface="Arial"/>
+                  <a:srgbClr val="1C1C1C"/>
+                </a:solidFill>
+                <a:latin typeface="Trebuchet MS"/>
               </a:rPr>
               <a:t>Three tall columns. Left: a poster on a fence with a group of five standing, one pointing. Middle, top: a laptop connected to a TV on a table in a shaded room with seated learners; middle, bottom: a group of five crowded around a tablet held by one of them. Right: a group of five watching a phone; beneath it, a hand signing on a phone screen with a…</a:t>
             </a:r>
@@ -5910,7 +5910,7 @@
     <p:bg>
       <p:bgPr>
         <a:solidFill>
-          <a:srgbClr val="F7F2E9"/>
+          <a:srgbClr val="C9A77C"/>
         </a:solidFill>
         <a:effectLst/>
       </p:bgPr>
@@ -5952,9 +5952,9 @@
             <a:r>
               <a:rPr sz="1000" b="0">
                 <a:solidFill>
-                  <a:srgbClr val="6B6255"/>
-                </a:solidFill>
-                <a:latin typeface="Arial"/>
+                  <a:srgbClr val="1C1C1C"/>
+                </a:solidFill>
+                <a:latin typeface="Trebuchet MS"/>
               </a:rPr>
               <a:t>T-D4-12   ·   Poster T-P13</a:t>
             </a:r>
@@ -5991,9 +5991,9 @@
             <a:r>
               <a:rPr sz="1000" b="0">
                 <a:solidFill>
-                  <a:srgbClr val="6B6255"/>
-                </a:solidFill>
-                <a:latin typeface="Arial"/>
+                  <a:srgbClr val="1C1C1C"/>
+                </a:solidFill>
+                <a:latin typeface="Trebuchet MS"/>
               </a:rPr>
               <a:t>Teach the Teachers</a:t>
             </a:r>
@@ -6015,7 +6015,7 @@
             <a:avLst/>
           </a:prstGeom>
           <a:solidFill>
-            <a:srgbClr val="235E86"/>
+            <a:srgbClr val="2C6FB7"/>
           </a:solidFill>
           <a:ln>
             <a:noFill/>
@@ -6074,9 +6074,9 @@
             <a:r>
               <a:rPr sz="1200" b="1">
                 <a:solidFill>
-                  <a:srgbClr val="F7F2E9"/>
-                </a:solidFill>
-                <a:latin typeface="Arial"/>
+                  <a:srgbClr val="C9A77C"/>
+                </a:solidFill>
+                <a:latin typeface="Trebuchet MS"/>
               </a:rPr>
               <a:t>APP</a:t>
             </a:r>
@@ -6098,7 +6098,7 @@
             <a:avLst/>
           </a:prstGeom>
           <a:solidFill>
-            <a:srgbClr val="C07A1E"/>
+            <a:srgbClr val="D2452C"/>
           </a:solidFill>
           <a:ln>
             <a:noFill/>
@@ -6157,9 +6157,9 @@
             <a:r>
               <a:rPr sz="1400" b="1">
                 <a:solidFill>
-                  <a:srgbClr val="F7F2E9"/>
-                </a:solidFill>
-                <a:latin typeface="Arial"/>
+                  <a:srgbClr val="C9A77C"/>
+                </a:solidFill>
+                <a:latin typeface="Trebuchet MS"/>
               </a:rPr>
               <a:t>YOUR TURN</a:t>
             </a:r>
@@ -6196,9 +6196,9 @@
             <a:r>
               <a:rPr sz="3800" b="1">
                 <a:solidFill>
-                  <a:srgbClr val="1F4D2B"/>
-                </a:solidFill>
-                <a:latin typeface="Georgia"/>
+                  <a:srgbClr val="1C1C1C"/>
+                </a:solidFill>
+                <a:latin typeface="Segoe Print"/>
               </a:rPr>
               <a:t>My Studies, offline</a:t>
             </a:r>
@@ -6220,7 +6220,7 @@
             <a:avLst/>
           </a:prstGeom>
           <a:solidFill>
-            <a:srgbClr val="E2D8C4"/>
+            <a:srgbClr val="2C6FB7"/>
           </a:solidFill>
           <a:ln>
             <a:noFill/>
@@ -6279,9 +6279,9 @@
             <a:r>
               <a:rPr sz="3000" b="1">
                 <a:solidFill>
-                  <a:srgbClr val="20190F"/>
-                </a:solidFill>
-                <a:latin typeface="Arial"/>
+                  <a:srgbClr val="1C1C1C"/>
+                </a:solidFill>
+                <a:latin typeface="Trebuchet MS"/>
               </a:rPr>
               <a:t>•  Flight mode on</a:t>
             </a:r>
@@ -6295,9 +6295,9 @@
             <a:r>
               <a:rPr sz="3000" b="1">
                 <a:solidFill>
-                  <a:srgbClr val="20190F"/>
-                </a:solidFill>
-                <a:latin typeface="Arial"/>
+                  <a:srgbClr val="1C1C1C"/>
+                </a:solidFill>
+                <a:latin typeface="Trebuchet MS"/>
               </a:rPr>
               <a:t>•  Watch the clip, then do</a:t>
             </a:r>
@@ -6311,9 +6311,9 @@
             <a:r>
               <a:rPr sz="3000" b="1">
                 <a:solidFill>
-                  <a:srgbClr val="20190F"/>
-                </a:solidFill>
-                <a:latin typeface="Arial"/>
+                  <a:srgbClr val="1C1C1C"/>
+                </a:solidFill>
+                <a:latin typeface="Trebuchet MS"/>
               </a:rPr>
               <a:t>•  What can a clip show?</a:t>
             </a:r>
@@ -6335,11 +6335,11 @@
             <a:avLst/>
           </a:prstGeom>
           <a:solidFill>
-            <a:srgbClr val="FBF6EC"/>
+            <a:srgbClr val="C9A77C"/>
           </a:solidFill>
           <a:ln w="15875">
             <a:solidFill>
-              <a:srgbClr val="E2D8C4"/>
+              <a:srgbClr val="2C6FB7"/>
             </a:solidFill>
           </a:ln>
           <a:effectLst/>
@@ -6396,9 +6396,9 @@
             <a:r>
               <a:rPr sz="1200" b="1">
                 <a:solidFill>
-                  <a:srgbClr val="C07A1E"/>
-                </a:solidFill>
-                <a:latin typeface="Arial"/>
+                  <a:srgbClr val="D2452C"/>
+                </a:solidFill>
+                <a:latin typeface="Trebuchet MS"/>
               </a:rPr>
               <a:t>IMAGE · T-IMG-17 · coming</a:t>
             </a:r>
@@ -6435,9 +6435,9 @@
             <a:r>
               <a:rPr sz="1800" b="1">
                 <a:solidFill>
-                  <a:srgbClr val="1F4D2B"/>
-                </a:solidFill>
-                <a:latin typeface="Georgia"/>
+                  <a:srgbClr val="1C1C1C"/>
+                </a:solidFill>
+                <a:latin typeface="Segoe Print"/>
               </a:rPr>
               <a:t>Screenshot: My Studies → Study offline</a:t>
             </a:r>
@@ -6474,9 +6474,9 @@
             <a:r>
               <a:rPr sz="1100" b="0">
                 <a:solidFill>
-                  <a:srgbClr val="20190F"/>
-                </a:solidFill>
-                <a:latin typeface="Arial"/>
+                  <a:srgbClr val="1C1C1C"/>
+                </a:solidFill>
+                <a:latin typeface="Trebuchet MS"/>
               </a:rPr>
               <a:t>Capture from the live ImbewuField app on a phone (sample account, no personal data): **My Studies** with the **Study offline** panel open and the button "Save available lessons to this phone" visible. Frame it inside a simple drawn phone outline on Paper background, 16:9. Re-capture whenever the screen changes.</a:t>
             </a:r>
@@ -6497,7 +6497,7 @@
     <p:bg>
       <p:bgPr>
         <a:solidFill>
-          <a:srgbClr val="F7F2E9"/>
+          <a:srgbClr val="C9A77C"/>
         </a:solidFill>
         <a:effectLst/>
       </p:bgPr>
@@ -6539,9 +6539,9 @@
             <a:r>
               <a:rPr sz="1000" b="0">
                 <a:solidFill>
-                  <a:srgbClr val="6B6255"/>
-                </a:solidFill>
-                <a:latin typeface="Arial"/>
+                  <a:srgbClr val="1C1C1C"/>
+                </a:solidFill>
+                <a:latin typeface="Trebuchet MS"/>
               </a:rPr>
               <a:t>T-D4-13   ·   Poster T-P13</a:t>
             </a:r>
@@ -6578,9 +6578,9 @@
             <a:r>
               <a:rPr sz="1000" b="0">
                 <a:solidFill>
-                  <a:srgbClr val="6B6255"/>
-                </a:solidFill>
-                <a:latin typeface="Arial"/>
+                  <a:srgbClr val="1C1C1C"/>
+                </a:solidFill>
+                <a:latin typeface="Trebuchet MS"/>
               </a:rPr>
               <a:t>Teach the Teachers</a:t>
             </a:r>
@@ -6602,7 +6602,7 @@
             <a:avLst/>
           </a:prstGeom>
           <a:solidFill>
-            <a:srgbClr val="235E86"/>
+            <a:srgbClr val="2C6FB7"/>
           </a:solidFill>
           <a:ln>
             <a:noFill/>
@@ -6661,9 +6661,9 @@
             <a:r>
               <a:rPr sz="1200" b="1">
                 <a:solidFill>
-                  <a:srgbClr val="F7F2E9"/>
-                </a:solidFill>
-                <a:latin typeface="Arial"/>
+                  <a:srgbClr val="C9A77C"/>
+                </a:solidFill>
+                <a:latin typeface="Trebuchet MS"/>
               </a:rPr>
               <a:t>APP</a:t>
             </a:r>
@@ -6685,7 +6685,7 @@
             <a:avLst/>
           </a:prstGeom>
           <a:solidFill>
-            <a:srgbClr val="C07A1E"/>
+            <a:srgbClr val="D2452C"/>
           </a:solidFill>
           <a:ln>
             <a:noFill/>
@@ -6744,9 +6744,9 @@
             <a:r>
               <a:rPr sz="1400" b="1">
                 <a:solidFill>
-                  <a:srgbClr val="F7F2E9"/>
-                </a:solidFill>
-                <a:latin typeface="Arial"/>
+                  <a:srgbClr val="C9A77C"/>
+                </a:solidFill>
+                <a:latin typeface="Trebuchet MS"/>
               </a:rPr>
               <a:t>YOUR TURN</a:t>
             </a:r>
@@ -6783,9 +6783,9 @@
             <a:r>
               <a:rPr sz="3800" b="1">
                 <a:solidFill>
-                  <a:srgbClr val="1F4D2B"/>
-                </a:solidFill>
-                <a:latin typeface="Georgia"/>
+                  <a:srgbClr val="1C1C1C"/>
+                </a:solidFill>
+                <a:latin typeface="Segoe Print"/>
               </a:rPr>
               <a:t>Mentor → Training</a:t>
             </a:r>
@@ -6807,7 +6807,7 @@
             <a:avLst/>
           </a:prstGeom>
           <a:solidFill>
-            <a:srgbClr val="E2D8C4"/>
+            <a:srgbClr val="2C6FB7"/>
           </a:solidFill>
           <a:ln>
             <a:noFill/>
@@ -6866,9 +6866,9 @@
             <a:r>
               <a:rPr sz="3000" b="1">
                 <a:solidFill>
-                  <a:srgbClr val="20190F"/>
-                </a:solidFill>
-                <a:latin typeface="Arial"/>
+                  <a:srgbClr val="1C1C1C"/>
+                </a:solidFill>
+                <a:latin typeface="Trebuchet MS"/>
               </a:rPr>
               <a:t>•  Venue, date, attendance</a:t>
             </a:r>
@@ -6882,9 +6882,9 @@
             <a:r>
               <a:rPr sz="3000" b="1">
                 <a:solidFill>
-                  <a:srgbClr val="20190F"/>
-                </a:solidFill>
-                <a:latin typeface="Arial"/>
+                  <a:srgbClr val="1C1C1C"/>
+                </a:solidFill>
+                <a:latin typeface="Trebuchet MS"/>
               </a:rPr>
               <a:t>•  Signatures and a photo</a:t>
             </a:r>
@@ -6898,9 +6898,9 @@
             <a:r>
               <a:rPr sz="3000" b="1">
                 <a:solidFill>
-                  <a:srgbClr val="20190F"/>
-                </a:solidFill>
-                <a:latin typeface="Arial"/>
+                  <a:srgbClr val="1C1C1C"/>
+                </a:solidFill>
+                <a:latin typeface="Trebuchet MS"/>
               </a:rPr>
               <a:t>•  Feedback, saved offline</a:t>
             </a:r>
@@ -6922,11 +6922,11 @@
             <a:avLst/>
           </a:prstGeom>
           <a:solidFill>
-            <a:srgbClr val="FBF6EC"/>
+            <a:srgbClr val="C9A77C"/>
           </a:solidFill>
           <a:ln w="15875">
             <a:solidFill>
-              <a:srgbClr val="E2D8C4"/>
+              <a:srgbClr val="2C6FB7"/>
             </a:solidFill>
           </a:ln>
           <a:effectLst/>
@@ -6983,9 +6983,9 @@
             <a:r>
               <a:rPr sz="1200" b="1">
                 <a:solidFill>
-                  <a:srgbClr val="C07A1E"/>
-                </a:solidFill>
-                <a:latin typeface="Arial"/>
+                  <a:srgbClr val="D2452C"/>
+                </a:solidFill>
+                <a:latin typeface="Trebuchet MS"/>
               </a:rPr>
               <a:t>IMAGE · T-IMG-18 · coming</a:t>
             </a:r>
@@ -7022,9 +7022,9 @@
             <a:r>
               <a:rPr sz="1800" b="1">
                 <a:solidFill>
-                  <a:srgbClr val="1F4D2B"/>
-                </a:solidFill>
-                <a:latin typeface="Georgia"/>
+                  <a:srgbClr val="1C1C1C"/>
+                </a:solidFill>
+                <a:latin typeface="Segoe Print"/>
               </a:rPr>
               <a:t>Screenshot: Mentor → Training</a:t>
             </a:r>
@@ -7061,9 +7061,9 @@
             <a:r>
               <a:rPr sz="1100" b="0">
                 <a:solidFill>
-                  <a:srgbClr val="20190F"/>
-                </a:solidFill>
-                <a:latin typeface="Arial"/>
+                  <a:srgbClr val="1C1C1C"/>
+                </a:solidFill>
+                <a:latin typeface="Trebuchet MS"/>
               </a:rPr>
               <a:t>Capture from the app (sample mode only — invented sample names, no real people): the **Mentor** workspace, **Training** view showing an attendance list, a signature box and the venue/date fields. Blur or replace any real names. Frame in a phone or tablet outline.</a:t>
             </a:r>
@@ -7084,7 +7084,7 @@
     <p:bg>
       <p:bgPr>
         <a:solidFill>
-          <a:srgbClr val="F7F2E9"/>
+          <a:srgbClr val="C9A77C"/>
         </a:solidFill>
         <a:effectLst/>
       </p:bgPr>
@@ -7126,9 +7126,9 @@
             <a:r>
               <a:rPr sz="1000" b="0">
                 <a:solidFill>
-                  <a:srgbClr val="6B6255"/>
-                </a:solidFill>
-                <a:latin typeface="Arial"/>
+                  <a:srgbClr val="1C1C1C"/>
+                </a:solidFill>
+                <a:latin typeface="Trebuchet MS"/>
               </a:rPr>
               <a:t>T-D4-14   ·   Poster T-P13</a:t>
             </a:r>
@@ -7165,9 +7165,9 @@
             <a:r>
               <a:rPr sz="1000" b="0">
                 <a:solidFill>
-                  <a:srgbClr val="6B6255"/>
-                </a:solidFill>
-                <a:latin typeface="Arial"/>
+                  <a:srgbClr val="1C1C1C"/>
+                </a:solidFill>
+                <a:latin typeface="Trebuchet MS"/>
               </a:rPr>
               <a:t>Teach the Teachers</a:t>
             </a:r>
@@ -7189,7 +7189,7 @@
             <a:avLst/>
           </a:prstGeom>
           <a:solidFill>
-            <a:srgbClr val="235E86"/>
+            <a:srgbClr val="2C6FB7"/>
           </a:solidFill>
           <a:ln>
             <a:noFill/>
@@ -7248,9 +7248,9 @@
             <a:r>
               <a:rPr sz="1200" b="1">
                 <a:solidFill>
-                  <a:srgbClr val="F7F2E9"/>
-                </a:solidFill>
-                <a:latin typeface="Arial"/>
+                  <a:srgbClr val="C9A77C"/>
+                </a:solidFill>
+                <a:latin typeface="Trebuchet MS"/>
               </a:rPr>
               <a:t>APP</a:t>
             </a:r>
@@ -7272,7 +7272,7 @@
             <a:avLst/>
           </a:prstGeom>
           <a:solidFill>
-            <a:srgbClr val="C07A1E"/>
+            <a:srgbClr val="D2452C"/>
           </a:solidFill>
           <a:ln>
             <a:noFill/>
@@ -7331,9 +7331,9 @@
             <a:r>
               <a:rPr sz="1400" b="1">
                 <a:solidFill>
-                  <a:srgbClr val="F7F2E9"/>
-                </a:solidFill>
-                <a:latin typeface="Arial"/>
+                  <a:srgbClr val="C9A77C"/>
+                </a:solidFill>
+                <a:latin typeface="Trebuchet MS"/>
               </a:rPr>
               <a:t>YOUR TURN</a:t>
             </a:r>
@@ -7370,9 +7370,9 @@
             <a:r>
               <a:rPr sz="3800" b="1">
                 <a:solidFill>
-                  <a:srgbClr val="1F4D2B"/>
-                </a:solidFill>
-                <a:latin typeface="Georgia"/>
+                  <a:srgbClr val="1C1C1C"/>
+                </a:solidFill>
+                <a:latin typeface="Segoe Print"/>
               </a:rPr>
               <a:t>Lima Vision: do we agree?</a:t>
             </a:r>
@@ -7394,7 +7394,7 @@
             <a:avLst/>
           </a:prstGeom>
           <a:solidFill>
-            <a:srgbClr val="E2D8C4"/>
+            <a:srgbClr val="2C6FB7"/>
           </a:solidFill>
           <a:ln>
             <a:noFill/>
@@ -7453,9 +7453,9 @@
             <a:r>
               <a:rPr sz="3000" b="1">
                 <a:solidFill>
-                  <a:srgbClr val="20190F"/>
-                </a:solidFill>
-                <a:latin typeface="Arial"/>
+                  <a:srgbClr val="1C1C1C"/>
+                </a:solidFill>
+                <a:latin typeface="Trebuchet MS"/>
               </a:rPr>
               <a:t>•  Photograph the leaf</a:t>
             </a:r>
@@ -7469,9 +7469,9 @@
             <a:r>
               <a:rPr sz="3000" b="1">
                 <a:solidFill>
-                  <a:srgbClr val="20190F"/>
-                </a:solidFill>
-                <a:latin typeface="Arial"/>
+                  <a:srgbClr val="1C1C1C"/>
+                </a:solidFill>
+                <a:latin typeface="Trebuchet MS"/>
               </a:rPr>
               <a:t>•  Read the result together</a:t>
             </a:r>
@@ -7485,9 +7485,9 @@
             <a:r>
               <a:rPr sz="3000" b="1">
                 <a:solidFill>
-                  <a:srgbClr val="20190F"/>
-                </a:solidFill>
-                <a:latin typeface="Arial"/>
+                  <a:srgbClr val="1C1C1C"/>
+                </a:solidFill>
+                <a:latin typeface="Trebuchet MS"/>
               </a:rPr>
               <a:t>•  How could we check?</a:t>
             </a:r>
@@ -7509,11 +7509,11 @@
             <a:avLst/>
           </a:prstGeom>
           <a:solidFill>
-            <a:srgbClr val="FBF6EC"/>
+            <a:srgbClr val="C9A77C"/>
           </a:solidFill>
           <a:ln w="15875">
             <a:solidFill>
-              <a:srgbClr val="E2D8C4"/>
+              <a:srgbClr val="2C6FB7"/>
             </a:solidFill>
           </a:ln>
           <a:effectLst/>
@@ -7570,9 +7570,9 @@
             <a:r>
               <a:rPr sz="1200" b="1">
                 <a:solidFill>
-                  <a:srgbClr val="C07A1E"/>
-                </a:solidFill>
-                <a:latin typeface="Arial"/>
+                  <a:srgbClr val="D2452C"/>
+                </a:solidFill>
+                <a:latin typeface="Trebuchet MS"/>
               </a:rPr>
               <a:t>IMAGE · T-IMG-19 · coming</a:t>
             </a:r>
@@ -7609,9 +7609,9 @@
             <a:r>
               <a:rPr sz="1800" b="1">
                 <a:solidFill>
-                  <a:srgbClr val="1F4D2B"/>
-                </a:solidFill>
-                <a:latin typeface="Georgia"/>
+                  <a:srgbClr val="1C1C1C"/>
+                </a:solidFill>
+                <a:latin typeface="Segoe Print"/>
               </a:rPr>
               <a:t>Screenshot: Lima Vision result</a:t>
             </a:r>
@@ -7648,9 +7648,9 @@
             <a:r>
               <a:rPr sz="1100" b="0">
                 <a:solidFill>
-                  <a:srgbClr val="20190F"/>
-                </a:solidFill>
-                <a:latin typeface="Arial"/>
+                  <a:srgbClr val="1C1C1C"/>
+                </a:solidFill>
+                <a:latin typeface="Trebuchet MS"/>
               </a:rPr>
               <a:t>Capture from the app (sample account): a **Lima Vision** result for a photo of a leafy crop, showing the crop identification and the yield/weigh screen. Photo subject must be a plant, not a person. Frame in a phone outline.</a:t>
             </a:r>
@@ -7671,7 +7671,7 @@
     <p:bg>
       <p:bgPr>
         <a:solidFill>
-          <a:srgbClr val="F7F2E9"/>
+          <a:srgbClr val="C9A77C"/>
         </a:solidFill>
         <a:effectLst/>
       </p:bgPr>
@@ -7713,9 +7713,9 @@
             <a:r>
               <a:rPr sz="1000" b="0">
                 <a:solidFill>
-                  <a:srgbClr val="6B6255"/>
-                </a:solidFill>
-                <a:latin typeface="Arial"/>
+                  <a:srgbClr val="1C1C1C"/>
+                </a:solidFill>
+                <a:latin typeface="Trebuchet MS"/>
               </a:rPr>
               <a:t>T-D4-15   ·   Poster T-P13</a:t>
             </a:r>
@@ -7752,9 +7752,9 @@
             <a:r>
               <a:rPr sz="1000" b="0">
                 <a:solidFill>
-                  <a:srgbClr val="6B6255"/>
-                </a:solidFill>
-                <a:latin typeface="Arial"/>
+                  <a:srgbClr val="1C1C1C"/>
+                </a:solidFill>
+                <a:latin typeface="Trebuchet MS"/>
               </a:rPr>
               <a:t>Teach the Teachers</a:t>
             </a:r>
@@ -7776,7 +7776,7 @@
             <a:avLst/>
           </a:prstGeom>
           <a:solidFill>
-            <a:srgbClr val="C07A1E"/>
+            <a:srgbClr val="D2452C"/>
           </a:solidFill>
           <a:ln>
             <a:noFill/>
@@ -7835,9 +7835,9 @@
             <a:r>
               <a:rPr sz="1400" b="1">
                 <a:solidFill>
-                  <a:srgbClr val="F7F2E9"/>
-                </a:solidFill>
-                <a:latin typeface="Arial"/>
+                  <a:srgbClr val="C9A77C"/>
+                </a:solidFill>
+                <a:latin typeface="Trebuchet MS"/>
               </a:rPr>
               <a:t>YOUR TURN</a:t>
             </a:r>
@@ -7874,9 +7874,9 @@
             <a:r>
               <a:rPr sz="3800" b="1">
                 <a:solidFill>
-                  <a:srgbClr val="1F4D2B"/>
-                </a:solidFill>
-                <a:latin typeface="Georgia"/>
+                  <a:srgbClr val="1C1C1C"/>
+                </a:solidFill>
+                <a:latin typeface="Segoe Print"/>
               </a:rPr>
               <a:t>Micro-teaching Round 4</a:t>
             </a:r>
@@ -7898,7 +7898,7 @@
             <a:avLst/>
           </a:prstGeom>
           <a:solidFill>
-            <a:srgbClr val="E2D8C4"/>
+            <a:srgbClr val="2C6FB7"/>
           </a:solidFill>
           <a:ln>
             <a:noFill/>
@@ -7957,9 +7957,9 @@
             <a:r>
               <a:rPr sz="3000" b="1">
                 <a:solidFill>
-                  <a:srgbClr val="20190F"/>
-                </a:solidFill>
-                <a:latin typeface="Arial"/>
+                  <a:srgbClr val="1C1C1C"/>
+                </a:solidFill>
+                <a:latin typeface="Trebuchet MS"/>
               </a:rPr>
               <a:t>•  20 minutes, pairs</a:t>
             </a:r>
@@ -7973,9 +7973,9 @@
             <a:r>
               <a:rPr sz="3000" b="1">
                 <a:solidFill>
-                  <a:srgbClr val="20190F"/>
-                </a:solidFill>
-                <a:latin typeface="Arial"/>
+                  <a:srgbClr val="1C1C1C"/>
+                </a:solidFill>
+                <a:latin typeface="Trebuchet MS"/>
               </a:rPr>
               <a:t>•  Slides or app — your choice</a:t>
             </a:r>
@@ -7989,9 +7989,9 @@
             <a:r>
               <a:rPr sz="3000" b="1">
                 <a:solidFill>
-                  <a:srgbClr val="20190F"/>
-                </a:solidFill>
-                <a:latin typeface="Arial"/>
+                  <a:srgbClr val="1C1C1C"/>
+                </a:solidFill>
+                <a:latin typeface="Trebuchet MS"/>
               </a:rPr>
               <a:t>•  A device may fail on purpose</a:t>
             </a:r>
@@ -8013,11 +8013,11 @@
             <a:avLst/>
           </a:prstGeom>
           <a:solidFill>
-            <a:srgbClr val="FBF6EC"/>
+            <a:srgbClr val="C9A77C"/>
           </a:solidFill>
           <a:ln w="15875">
             <a:solidFill>
-              <a:srgbClr val="E2D8C4"/>
+              <a:srgbClr val="2C6FB7"/>
             </a:solidFill>
           </a:ln>
           <a:effectLst/>
@@ -8074,9 +8074,9 @@
             <a:r>
               <a:rPr sz="1200" b="1">
                 <a:solidFill>
-                  <a:srgbClr val="C07A1E"/>
-                </a:solidFill>
-                <a:latin typeface="Arial"/>
+                  <a:srgbClr val="D2452C"/>
+                </a:solidFill>
+                <a:latin typeface="Trebuchet MS"/>
               </a:rPr>
               <a:t>IMAGE · T-IMG-04 · coming</a:t>
             </a:r>
@@ -8113,9 +8113,9 @@
             <a:r>
               <a:rPr sz="1800" b="1">
                 <a:solidFill>
-                  <a:srgbClr val="1F4D2B"/>
-                </a:solidFill>
-                <a:latin typeface="Georgia"/>
+                  <a:srgbClr val="1C1C1C"/>
+                </a:solidFill>
+                <a:latin typeface="Segoe Print"/>
               </a:rPr>
               <a:t>A tablet for a group of five</a:t>
             </a:r>
@@ -8152,9 +8152,9 @@
             <a:r>
               <a:rPr sz="1100" b="0">
                 <a:solidFill>
-                  <a:srgbClr val="20190F"/>
-                </a:solidFill>
-                <a:latin typeface="Arial"/>
+                  <a:srgbClr val="1C1C1C"/>
+                </a:solidFill>
+                <a:latin typeface="Trebuchet MS"/>
               </a:rPr>
               <a:t>Five learners crowd round a tablet held by a young man (the Recorder) at a garden table outdoors in shade. The tablet screen shows a simple animation frame of water soaking into soil (Water blue, soil Ochre). An older woman points at the screen; a young woman beside her already has her hands in a tray of soil, doing what they just watched. A facilitator…</a:t>
             </a:r>
@@ -8175,7 +8175,7 @@
     <p:bg>
       <p:bgPr>
         <a:solidFill>
-          <a:srgbClr val="F7F2E9"/>
+          <a:srgbClr val="C9A77C"/>
         </a:solidFill>
         <a:effectLst/>
       </p:bgPr>
@@ -8217,9 +8217,9 @@
             <a:r>
               <a:rPr sz="1000" b="0">
                 <a:solidFill>
-                  <a:srgbClr val="6B6255"/>
-                </a:solidFill>
-                <a:latin typeface="Arial"/>
+                  <a:srgbClr val="1C1C1C"/>
+                </a:solidFill>
+                <a:latin typeface="Trebuchet MS"/>
               </a:rPr>
               <a:t>T-D4-16   ·   Poster T-P13</a:t>
             </a:r>
@@ -8256,9 +8256,9 @@
             <a:r>
               <a:rPr sz="1000" b="0">
                 <a:solidFill>
-                  <a:srgbClr val="6B6255"/>
-                </a:solidFill>
-                <a:latin typeface="Arial"/>
+                  <a:srgbClr val="1C1C1C"/>
+                </a:solidFill>
+                <a:latin typeface="Trebuchet MS"/>
               </a:rPr>
               <a:t>Teach the Teachers</a:t>
             </a:r>
@@ -8295,9 +8295,9 @@
             <a:r>
               <a:rPr sz="3800" b="1">
                 <a:solidFill>
-                  <a:srgbClr val="1F4D2B"/>
-                </a:solidFill>
-                <a:latin typeface="Georgia"/>
+                  <a:srgbClr val="1C1C1C"/>
+                </a:solidFill>
+                <a:latin typeface="Segoe Print"/>
               </a:rPr>
               <a:t>When the device fails</a:t>
             </a:r>
@@ -8319,7 +8319,7 @@
             <a:avLst/>
           </a:prstGeom>
           <a:solidFill>
-            <a:srgbClr val="E2D8C4"/>
+            <a:srgbClr val="2C6FB7"/>
           </a:solidFill>
           <a:ln>
             <a:noFill/>
@@ -8378,9 +8378,9 @@
             <a:r>
               <a:rPr sz="2800" b="0">
                 <a:solidFill>
-                  <a:srgbClr val="20190F"/>
-                </a:solidFill>
-                <a:latin typeface="Arial"/>
+                  <a:srgbClr val="1C1C1C"/>
+                </a:solidFill>
+                <a:latin typeface="Trebuchet MS"/>
               </a:rPr>
               <a:t>•  Switch in 30 seconds</a:t>
             </a:r>
@@ -8394,9 +8394,9 @@
             <a:r>
               <a:rPr sz="2800" b="0">
                 <a:solidFill>
-                  <a:srgbClr val="20190F"/>
-                </a:solidFill>
-                <a:latin typeface="Arial"/>
+                  <a:srgbClr val="1C1C1C"/>
+                </a:solidFill>
+                <a:latin typeface="Trebuchet MS"/>
               </a:rPr>
               <a:t>•  Poster or flip-book</a:t>
             </a:r>
@@ -8410,9 +8410,9 @@
             <a:r>
               <a:rPr sz="2800" b="0">
                 <a:solidFill>
-                  <a:srgbClr val="20190F"/>
-                </a:solidFill>
-                <a:latin typeface="Arial"/>
+                  <a:srgbClr val="1C1C1C"/>
+                </a:solidFill>
+                <a:latin typeface="Trebuchet MS"/>
               </a:rPr>
               <a:t>•  Don't apologise, keep going</a:t>
             </a:r>
@@ -8434,11 +8434,11 @@
             <a:avLst/>
           </a:prstGeom>
           <a:solidFill>
-            <a:srgbClr val="FBF6EC"/>
+            <a:srgbClr val="C9A77C"/>
           </a:solidFill>
           <a:ln w="15875">
             <a:solidFill>
-              <a:srgbClr val="E2D8C4"/>
+              <a:srgbClr val="2C6FB7"/>
             </a:solidFill>
           </a:ln>
           <a:effectLst/>
@@ -8495,9 +8495,9 @@
             <a:r>
               <a:rPr sz="1200" b="1">
                 <a:solidFill>
-                  <a:srgbClr val="C07A1E"/>
-                </a:solidFill>
-                <a:latin typeface="Arial"/>
+                  <a:srgbClr val="D2452C"/>
+                </a:solidFill>
+                <a:latin typeface="Trebuchet MS"/>
               </a:rPr>
               <a:t>IMAGE · T-IMG-03 · coming</a:t>
             </a:r>
@@ -8534,9 +8534,9 @@
             <a:r>
               <a:rPr sz="1800" b="1">
                 <a:solidFill>
-                  <a:srgbClr val="1F4D2B"/>
-                </a:solidFill>
-                <a:latin typeface="Georgia"/>
+                  <a:srgbClr val="1C1C1C"/>
+                </a:solidFill>
+                <a:latin typeface="Segoe Print"/>
               </a:rPr>
               <a:t>Projector in daylight</a:t>
             </a:r>
@@ -8573,9 +8573,9 @@
             <a:r>
               <a:rPr sz="1100" b="0">
                 <a:solidFill>
-                  <a:srgbClr val="20190F"/>
-                </a:solidFill>
-                <a:latin typeface="Arial"/>
+                  <a:srgbClr val="1C1C1C"/>
+                </a:solidFill>
+                <a:latin typeface="Trebuchet MS"/>
               </a:rPr>
               <a:t>Split image. Left: a bright church hall with open windows; a projector on a table throws a pale, washed-out rectangle onto a white wall — nothing on it can be seen; learners at the back squint and shade their eyes. Right: the same group in a shaded corner of the hall, gathered close around a large TV on a table; the TV shows a clear picture of a green…</a:t>
             </a:r>
@@ -8596,7 +8596,7 @@
     <p:bg>
       <p:bgPr>
         <a:solidFill>
-          <a:srgbClr val="F7F2E9"/>
+          <a:srgbClr val="C9A77C"/>
         </a:solidFill>
         <a:effectLst/>
       </p:bgPr>
@@ -8638,9 +8638,9 @@
             <a:r>
               <a:rPr sz="1000" b="0">
                 <a:solidFill>
-                  <a:srgbClr val="6B6255"/>
-                </a:solidFill>
-                <a:latin typeface="Arial"/>
+                  <a:srgbClr val="1C1C1C"/>
+                </a:solidFill>
+                <a:latin typeface="Trebuchet MS"/>
               </a:rPr>
               <a:t>T-D4-17   ·   Poster T-P15</a:t>
             </a:r>
@@ -8677,9 +8677,9 @@
             <a:r>
               <a:rPr sz="1000" b="0">
                 <a:solidFill>
-                  <a:srgbClr val="6B6255"/>
-                </a:solidFill>
-                <a:latin typeface="Arial"/>
+                  <a:srgbClr val="1C1C1C"/>
+                </a:solidFill>
+                <a:latin typeface="Trebuchet MS"/>
               </a:rPr>
               <a:t>Teach the Teachers</a:t>
             </a:r>
@@ -8716,9 +8716,9 @@
             <a:r>
               <a:rPr sz="3800" b="1">
                 <a:solidFill>
-                  <a:srgbClr val="1F4D2B"/>
-                </a:solidFill>
-                <a:latin typeface="Georgia"/>
+                  <a:srgbClr val="1C1C1C"/>
+                </a:solidFill>
+                <a:latin typeface="Segoe Print"/>
               </a:rPr>
               <a:t>Course craft: report and certificates</a:t>
             </a:r>
@@ -8740,7 +8740,7 @@
             <a:avLst/>
           </a:prstGeom>
           <a:solidFill>
-            <a:srgbClr val="E2D8C4"/>
+            <a:srgbClr val="2C6FB7"/>
           </a:solidFill>
           <a:ln>
             <a:noFill/>
@@ -8799,9 +8799,9 @@
             <a:r>
               <a:rPr sz="2400" b="0">
                 <a:solidFill>
-                  <a:srgbClr val="20190F"/>
-                </a:solidFill>
-                <a:latin typeface="Arial"/>
+                  <a:srgbClr val="1C1C1C"/>
+                </a:solidFill>
+                <a:latin typeface="Trebuchet MS"/>
               </a:rPr>
               <a:t>•  Daily report with register photo</a:t>
             </a:r>
@@ -8815,9 +8815,9 @@
             <a:r>
               <a:rPr sz="2400" b="0">
                 <a:solidFill>
-                  <a:srgbClr val="20190F"/>
-                </a:solidFill>
-                <a:latin typeface="Arial"/>
+                  <a:srgbClr val="1C1C1C"/>
+                </a:solidFill>
+                <a:latin typeface="Trebuchet MS"/>
               </a:rPr>
               <a:t>•  Attendance, not qualification</a:t>
             </a:r>
@@ -8831,9 +8831,9 @@
             <a:r>
               <a:rPr sz="2400" b="0">
                 <a:solidFill>
-                  <a:srgbClr val="20190F"/>
-                </a:solidFill>
-                <a:latin typeface="Arial"/>
+                  <a:srgbClr val="1C1C1C"/>
+                </a:solidFill>
+                <a:latin typeface="Trebuchet MS"/>
               </a:rPr>
               <a:t>•  Tomorrow: Round 5, 30 minutes</a:t>
             </a:r>
@@ -8855,11 +8855,11 @@
             <a:avLst/>
           </a:prstGeom>
           <a:solidFill>
-            <a:srgbClr val="FBF6EC"/>
+            <a:srgbClr val="C9A77C"/>
           </a:solidFill>
           <a:ln w="15875">
             <a:solidFill>
-              <a:srgbClr val="E2D8C4"/>
+              <a:srgbClr val="2C6FB7"/>
             </a:solidFill>
           </a:ln>
           <a:effectLst/>
@@ -8916,9 +8916,9 @@
             <a:r>
               <a:rPr sz="1200" b="1">
                 <a:solidFill>
-                  <a:srgbClr val="C07A1E"/>
-                </a:solidFill>
-                <a:latin typeface="Arial"/>
+                  <a:srgbClr val="D2452C"/>
+                </a:solidFill>
+                <a:latin typeface="Trebuchet MS"/>
               </a:rPr>
               <a:t>IMAGE · T-IMG-13 · coming</a:t>
             </a:r>
@@ -8955,9 +8955,9 @@
             <a:r>
               <a:rPr sz="1800" b="1">
                 <a:solidFill>
-                  <a:srgbClr val="1F4D2B"/>
-                </a:solidFill>
-                <a:latin typeface="Georgia"/>
+                  <a:srgbClr val="1C1C1C"/>
+                </a:solidFill>
+                <a:latin typeface="Segoe Print"/>
               </a:rPr>
               <a:t>The certificate handshake</a:t>
             </a:r>
@@ -8994,9 +8994,9 @@
             <a:r>
               <a:rPr sz="1100" b="0">
                 <a:solidFill>
-                  <a:srgbClr val="20190F"/>
-                </a:solidFill>
-                <a:latin typeface="Arial"/>
+                  <a:srgbClr val="1C1C1C"/>
+                </a:solidFill>
+                <a:latin typeface="Trebuchet MS"/>
               </a:rPr>
               <a:t>Inside a hall decorated with posters, an older male trainer shakes hands with a young woman trainee while handing her a certificate (a sheet with a border and a seal shape, no readable text). Colleagues around them clap. Warm, proud mood.</a:t>
             </a:r>
@@ -9017,7 +9017,7 @@
     <p:bg>
       <p:bgPr>
         <a:solidFill>
-          <a:srgbClr val="F7F2E9"/>
+          <a:srgbClr val="C9A77C"/>
         </a:solidFill>
         <a:effectLst/>
       </p:bgPr>
@@ -9059,9 +9059,9 @@
             <a:r>
               <a:rPr sz="1000" b="0">
                 <a:solidFill>
-                  <a:srgbClr val="6B6255"/>
-                </a:solidFill>
-                <a:latin typeface="Arial"/>
+                  <a:srgbClr val="1C1C1C"/>
+                </a:solidFill>
+                <a:latin typeface="Trebuchet MS"/>
               </a:rPr>
               <a:t>T-D4-02   ·   Poster T-P22</a:t>
             </a:r>
@@ -9098,9 +9098,9 @@
             <a:r>
               <a:rPr sz="1000" b="0">
                 <a:solidFill>
-                  <a:srgbClr val="6B6255"/>
-                </a:solidFill>
-                <a:latin typeface="Arial"/>
+                  <a:srgbClr val="1C1C1C"/>
+                </a:solidFill>
+                <a:latin typeface="Trebuchet MS"/>
               </a:rPr>
               <a:t>Teach the Teachers</a:t>
             </a:r>
@@ -9137,9 +9137,9 @@
             <a:r>
               <a:rPr sz="3800" b="1">
                 <a:solidFill>
-                  <a:srgbClr val="1F4D2B"/>
-                </a:solidFill>
-                <a:latin typeface="Georgia"/>
+                  <a:srgbClr val="1C1C1C"/>
+                </a:solidFill>
+                <a:latin typeface="Segoe Print"/>
               </a:rPr>
               <a:t>Two brothers</a:t>
             </a:r>
@@ -9161,7 +9161,7 @@
             <a:avLst/>
           </a:prstGeom>
           <a:solidFill>
-            <a:srgbClr val="E2D8C4"/>
+            <a:srgbClr val="2C6FB7"/>
           </a:solidFill>
           <a:ln>
             <a:noFill/>
@@ -9220,9 +9220,9 @@
             <a:r>
               <a:rPr sz="2400" b="0">
                 <a:solidFill>
-                  <a:srgbClr val="20190F"/>
-                </a:solidFill>
-                <a:latin typeface="Arial"/>
+                  <a:srgbClr val="1C1C1C"/>
+                </a:solidFill>
+                <a:latin typeface="Trebuchet MS"/>
               </a:rPr>
               <a:t>•  Which brother would you ask for seed?</a:t>
             </a:r>
@@ -9244,11 +9244,11 @@
             <a:avLst/>
           </a:prstGeom>
           <a:solidFill>
-            <a:srgbClr val="FBF6EC"/>
+            <a:srgbClr val="C9A77C"/>
           </a:solidFill>
           <a:ln w="15875">
             <a:solidFill>
-              <a:srgbClr val="E2D8C4"/>
+              <a:srgbClr val="2C6FB7"/>
             </a:solidFill>
           </a:ln>
           <a:effectLst/>
@@ -9305,9 +9305,9 @@
             <a:r>
               <a:rPr sz="1200" b="1">
                 <a:solidFill>
-                  <a:srgbClr val="C07A1E"/>
-                </a:solidFill>
-                <a:latin typeface="Arial"/>
+                  <a:srgbClr val="D2452C"/>
+                </a:solidFill>
+                <a:latin typeface="Trebuchet MS"/>
               </a:rPr>
               <a:t>IMAGE · T-IMG-10 · coming</a:t>
             </a:r>
@@ -9344,9 +9344,9 @@
             <a:r>
               <a:rPr sz="1800" b="1">
                 <a:solidFill>
-                  <a:srgbClr val="1F4D2B"/>
-                </a:solidFill>
-                <a:latin typeface="Georgia"/>
+                  <a:srgbClr val="1C1C1C"/>
+                </a:solidFill>
+                <a:latin typeface="Segoe Print"/>
               </a:rPr>
               <a:t>Role play in threes</a:t>
             </a:r>
@@ -9383,9 +9383,9 @@
             <a:r>
               <a:rPr sz="1100" b="0">
                 <a:solidFill>
-                  <a:srgbClr val="20190F"/>
-                </a:solidFill>
-                <a:latin typeface="Arial"/>
+                  <a:srgbClr val="1C1C1C"/>
+                </a:solidFill>
+                <a:latin typeface="Trebuchet MS"/>
               </a:rPr>
               <a:t>Three adults standing on a veranda. An older man plays an annoyed learner, arms crossed, frowning (acted, a little comic). A young woman plays the facilitator: relaxed shoulders, open palms, calm face. A third person watches from the side holding a card and smiling. In the background other trios doing the same. Friendly, safe mood.</a:t>
             </a:r>
@@ -9406,7 +9406,7 @@
     <p:bg>
       <p:bgPr>
         <a:solidFill>
-          <a:srgbClr val="F7F2E9"/>
+          <a:srgbClr val="C9A77C"/>
         </a:solidFill>
         <a:effectLst/>
       </p:bgPr>
@@ -9448,9 +9448,9 @@
             <a:r>
               <a:rPr sz="1000" b="0">
                 <a:solidFill>
-                  <a:srgbClr val="6B6255"/>
-                </a:solidFill>
-                <a:latin typeface="Arial"/>
+                  <a:srgbClr val="1C1C1C"/>
+                </a:solidFill>
+                <a:latin typeface="Trebuchet MS"/>
               </a:rPr>
               <a:t>T-D4-03   ·   Poster T-P17</a:t>
             </a:r>
@@ -9487,9 +9487,9 @@
             <a:r>
               <a:rPr sz="1000" b="0">
                 <a:solidFill>
-                  <a:srgbClr val="6B6255"/>
-                </a:solidFill>
-                <a:latin typeface="Arial"/>
+                  <a:srgbClr val="1C1C1C"/>
+                </a:solidFill>
+                <a:latin typeface="Trebuchet MS"/>
               </a:rPr>
               <a:t>Teach the Teachers</a:t>
             </a:r>
@@ -9526,9 +9526,9 @@
             <a:r>
               <a:rPr sz="3800" b="1">
                 <a:solidFill>
-                  <a:srgbClr val="1F4D2B"/>
-                </a:solidFill>
-                <a:latin typeface="Georgia"/>
+                  <a:srgbClr val="1C1C1C"/>
+                </a:solidFill>
+                <a:latin typeface="Segoe Print"/>
               </a:rPr>
               <a:t>The story shape</a:t>
             </a:r>
@@ -9550,7 +9550,7 @@
             <a:avLst/>
           </a:prstGeom>
           <a:solidFill>
-            <a:srgbClr val="E2D8C4"/>
+            <a:srgbClr val="2C6FB7"/>
           </a:solidFill>
           <a:ln>
             <a:noFill/>
@@ -9609,9 +9609,9 @@
             <a:r>
               <a:rPr sz="2800" b="0">
                 <a:solidFill>
-                  <a:srgbClr val="20190F"/>
-                </a:solidFill>
-                <a:latin typeface="Arial"/>
+                  <a:srgbClr val="1C1C1C"/>
+                </a:solidFill>
+                <a:latin typeface="Trebuchet MS"/>
               </a:rPr>
               <a:t>•  Someone like us, a problem</a:t>
             </a:r>
@@ -9625,9 +9625,9 @@
             <a:r>
               <a:rPr sz="2800" b="0">
                 <a:solidFill>
-                  <a:srgbClr val="20190F"/>
-                </a:solidFill>
-                <a:latin typeface="Arial"/>
+                  <a:srgbClr val="1C1C1C"/>
+                </a:solidFill>
+                <a:latin typeface="Trebuchet MS"/>
               </a:rPr>
               <a:t>•  What they tried, what happened</a:t>
             </a:r>
@@ -9641,9 +9641,9 @@
             <a:r>
               <a:rPr sz="2800" b="0">
                 <a:solidFill>
-                  <a:srgbClr val="20190F"/>
-                </a:solidFill>
-                <a:latin typeface="Arial"/>
+                  <a:srgbClr val="1C1C1C"/>
+                </a:solidFill>
+                <a:latin typeface="Trebuchet MS"/>
               </a:rPr>
               <a:t>•  A question to the room</a:t>
             </a:r>
@@ -9665,11 +9665,11 @@
             <a:avLst/>
           </a:prstGeom>
           <a:solidFill>
-            <a:srgbClr val="FBF6EC"/>
+            <a:srgbClr val="C9A77C"/>
           </a:solidFill>
           <a:ln w="15875">
             <a:solidFill>
-              <a:srgbClr val="E2D8C4"/>
+              <a:srgbClr val="2C6FB7"/>
             </a:solidFill>
           </a:ln>
           <a:effectLst/>
@@ -9726,9 +9726,9 @@
             <a:r>
               <a:rPr sz="1200" b="1">
                 <a:solidFill>
-                  <a:srgbClr val="C07A1E"/>
-                </a:solidFill>
-                <a:latin typeface="Arial"/>
+                  <a:srgbClr val="D2452C"/>
+                </a:solidFill>
+                <a:latin typeface="Trebuchet MS"/>
               </a:rPr>
               <a:t>IMAGE · T-IMG-10 · coming</a:t>
             </a:r>
@@ -9765,9 +9765,9 @@
             <a:r>
               <a:rPr sz="1800" b="1">
                 <a:solidFill>
-                  <a:srgbClr val="1F4D2B"/>
-                </a:solidFill>
-                <a:latin typeface="Georgia"/>
+                  <a:srgbClr val="1C1C1C"/>
+                </a:solidFill>
+                <a:latin typeface="Segoe Print"/>
               </a:rPr>
               <a:t>Role play in threes</a:t>
             </a:r>
@@ -9804,9 +9804,9 @@
             <a:r>
               <a:rPr sz="1100" b="0">
                 <a:solidFill>
-                  <a:srgbClr val="20190F"/>
-                </a:solidFill>
-                <a:latin typeface="Arial"/>
+                  <a:srgbClr val="1C1C1C"/>
+                </a:solidFill>
+                <a:latin typeface="Trebuchet MS"/>
               </a:rPr>
               <a:t>Three adults standing on a veranda. An older man plays an annoyed learner, arms crossed, frowning (acted, a little comic). A young woman plays the facilitator: relaxed shoulders, open palms, calm face. A third person watches from the side holding a card and smiling. In the background other trios doing the same. Friendly, safe mood.</a:t>
             </a:r>
@@ -9827,7 +9827,7 @@
     <p:bg>
       <p:bgPr>
         <a:solidFill>
-          <a:srgbClr val="F7F2E9"/>
+          <a:srgbClr val="C9A77C"/>
         </a:solidFill>
         <a:effectLst/>
       </p:bgPr>
@@ -9869,9 +9869,9 @@
             <a:r>
               <a:rPr sz="1000" b="0">
                 <a:solidFill>
-                  <a:srgbClr val="6B6255"/>
-                </a:solidFill>
-                <a:latin typeface="Arial"/>
+                  <a:srgbClr val="1C1C1C"/>
+                </a:solidFill>
+                <a:latin typeface="Trebuchet MS"/>
               </a:rPr>
               <a:t>T-D4-04   ·   Poster T-P11</a:t>
             </a:r>
@@ -9908,9 +9908,9 @@
             <a:r>
               <a:rPr sz="1000" b="0">
                 <a:solidFill>
-                  <a:srgbClr val="6B6255"/>
-                </a:solidFill>
-                <a:latin typeface="Arial"/>
+                  <a:srgbClr val="1C1C1C"/>
+                </a:solidFill>
+                <a:latin typeface="Trebuchet MS"/>
               </a:rPr>
               <a:t>Teach the Teachers</a:t>
             </a:r>
@@ -9932,7 +9932,7 @@
             <a:avLst/>
           </a:prstGeom>
           <a:solidFill>
-            <a:srgbClr val="C07A1E"/>
+            <a:srgbClr val="D2452C"/>
           </a:solidFill>
           <a:ln>
             <a:noFill/>
@@ -9991,9 +9991,9 @@
             <a:r>
               <a:rPr sz="1400" b="1">
                 <a:solidFill>
-                  <a:srgbClr val="F7F2E9"/>
-                </a:solidFill>
-                <a:latin typeface="Arial"/>
+                  <a:srgbClr val="C9A77C"/>
+                </a:solidFill>
+                <a:latin typeface="Trebuchet MS"/>
               </a:rPr>
               <a:t>YOUR TURN</a:t>
             </a:r>
@@ -10030,9 +10030,9 @@
             <a:r>
               <a:rPr sz="3800" b="1">
                 <a:solidFill>
-                  <a:srgbClr val="1F4D2B"/>
-                </a:solidFill>
-                <a:latin typeface="Georgia"/>
+                  <a:srgbClr val="1C1C1C"/>
+                </a:solidFill>
+                <a:latin typeface="Segoe Print"/>
               </a:rPr>
               <a:t>Make a song</a:t>
             </a:r>
@@ -10054,7 +10054,7 @@
             <a:avLst/>
           </a:prstGeom>
           <a:solidFill>
-            <a:srgbClr val="E2D8C4"/>
+            <a:srgbClr val="2C6FB7"/>
           </a:solidFill>
           <a:ln>
             <a:noFill/>
@@ -10113,9 +10113,9 @@
             <a:r>
               <a:rPr sz="3000" b="1">
                 <a:solidFill>
-                  <a:srgbClr val="20190F"/>
-                </a:solidFill>
-                <a:latin typeface="Arial"/>
+                  <a:srgbClr val="1C1C1C"/>
+                </a:solidFill>
+                <a:latin typeface="Trebuchet MS"/>
               </a:rPr>
               <a:t>•  A tune everyone knows</a:t>
             </a:r>
@@ -10129,9 +10129,9 @@
             <a:r>
               <a:rPr sz="3000" b="1">
                 <a:solidFill>
-                  <a:srgbClr val="20190F"/>
-                </a:solidFill>
-                <a:latin typeface="Arial"/>
+                  <a:srgbClr val="1C1C1C"/>
+                </a:solidFill>
+                <a:latin typeface="Trebuchet MS"/>
               </a:rPr>
               <a:t>•  One key message</a:t>
             </a:r>
@@ -10145,9 +10145,9 @@
             <a:r>
               <a:rPr sz="3000" b="1">
                 <a:solidFill>
-                  <a:srgbClr val="20190F"/>
-                </a:solidFill>
-                <a:latin typeface="Arial"/>
+                  <a:srgbClr val="1C1C1C"/>
+                </a:solidFill>
+                <a:latin typeface="Trebuchet MS"/>
               </a:rPr>
               <a:t>•  13 minutes</a:t>
             </a:r>
@@ -10169,11 +10169,11 @@
             <a:avLst/>
           </a:prstGeom>
           <a:solidFill>
-            <a:srgbClr val="FBF6EC"/>
+            <a:srgbClr val="C9A77C"/>
           </a:solidFill>
           <a:ln w="15875">
             <a:solidFill>
-              <a:srgbClr val="E2D8C4"/>
+              <a:srgbClr val="2C6FB7"/>
             </a:solidFill>
           </a:ln>
           <a:effectLst/>
@@ -10230,9 +10230,9 @@
             <a:r>
               <a:rPr sz="1200" b="1">
                 <a:solidFill>
-                  <a:srgbClr val="C07A1E"/>
-                </a:solidFill>
-                <a:latin typeface="Arial"/>
+                  <a:srgbClr val="D2452C"/>
+                </a:solidFill>
+                <a:latin typeface="Trebuchet MS"/>
               </a:rPr>
               <a:t>IMAGE · T-IMG-09 · coming</a:t>
             </a:r>
@@ -10269,9 +10269,9 @@
             <a:r>
               <a:rPr sz="1800" b="1">
                 <a:solidFill>
-                  <a:srgbClr val="1F4D2B"/>
-                </a:solidFill>
-                <a:latin typeface="Georgia"/>
+                  <a:srgbClr val="1C1C1C"/>
+                </a:solidFill>
+                <a:latin typeface="Segoe Print"/>
               </a:rPr>
               <a:t>A gallery walk</a:t>
             </a:r>
@@ -10308,9 +10308,9 @@
             <a:r>
               <a:rPr sz="1100" b="0">
                 <a:solidFill>
-                  <a:srgbClr val="20190F"/>
-                </a:solidFill>
-                <a:latin typeface="Arial"/>
+                  <a:srgbClr val="1C1C1C"/>
+                </a:solidFill>
+                <a:latin typeface="Trebuchet MS"/>
               </a:rPr>
               <a:t>An outdoor space with six stations along a fence and two walls, each with a poster (simple shapes) and a small table of objects: seed trays, string, jars, seed packets, insect picture cards. Four small groups are each busy at a different station — sowing, measuring with string, sorting cards. A facilitator rings a small hand bell near the middle.…</a:t>
             </a:r>
@@ -10331,7 +10331,7 @@
     <p:bg>
       <p:bgPr>
         <a:solidFill>
-          <a:srgbClr val="F7F2E9"/>
+          <a:srgbClr val="C9A77C"/>
         </a:solidFill>
         <a:effectLst/>
       </p:bgPr>
@@ -10373,9 +10373,9 @@
             <a:r>
               <a:rPr sz="1000" b="0">
                 <a:solidFill>
-                  <a:srgbClr val="6B6255"/>
-                </a:solidFill>
-                <a:latin typeface="Arial"/>
+                  <a:srgbClr val="1C1C1C"/>
+                </a:solidFill>
+                <a:latin typeface="Trebuchet MS"/>
               </a:rPr>
               <a:t>T-D4-05   ·   Poster T-P22</a:t>
             </a:r>
@@ -10412,9 +10412,9 @@
             <a:r>
               <a:rPr sz="1000" b="0">
                 <a:solidFill>
-                  <a:srgbClr val="6B6255"/>
-                </a:solidFill>
-                <a:latin typeface="Arial"/>
+                  <a:srgbClr val="1C1C1C"/>
+                </a:solidFill>
+                <a:latin typeface="Trebuchet MS"/>
               </a:rPr>
               <a:t>Teach the Teachers</a:t>
             </a:r>
@@ -10451,9 +10451,9 @@
             <a:r>
               <a:rPr sz="3800" b="1">
                 <a:solidFill>
-                  <a:srgbClr val="1F4D2B"/>
-                </a:solidFill>
-                <a:latin typeface="Georgia"/>
+                  <a:srgbClr val="1C1C1C"/>
+                </a:solidFill>
+                <a:latin typeface="Segoe Print"/>
               </a:rPr>
               <a:t>Calm in a difficult moment</a:t>
             </a:r>
@@ -10475,7 +10475,7 @@
             <a:avLst/>
           </a:prstGeom>
           <a:solidFill>
-            <a:srgbClr val="E2D8C4"/>
+            <a:srgbClr val="2C6FB7"/>
           </a:solidFill>
           <a:ln>
             <a:noFill/>
@@ -10534,9 +10534,9 @@
             <a:r>
               <a:rPr sz="2800" b="0">
                 <a:solidFill>
-                  <a:srgbClr val="20190F"/>
-                </a:solidFill>
-                <a:latin typeface="Arial"/>
+                  <a:srgbClr val="1C1C1C"/>
+                </a:solidFill>
+                <a:latin typeface="Trebuchet MS"/>
               </a:rPr>
               <a:t>•  Breathe · Name it kindly</a:t>
             </a:r>
@@ -10550,9 +10550,9 @@
             <a:r>
               <a:rPr sz="2800" b="0">
                 <a:solidFill>
-                  <a:srgbClr val="20190F"/>
-                </a:solidFill>
-                <a:latin typeface="Arial"/>
+                  <a:srgbClr val="1C1C1C"/>
+                </a:solidFill>
+                <a:latin typeface="Trebuchet MS"/>
               </a:rPr>
               <a:t>•  Listen, ask · Offer a way on</a:t>
             </a:r>
@@ -10566,9 +10566,9 @@
             <a:r>
               <a:rPr sz="2800" b="0">
                 <a:solidFill>
-                  <a:srgbClr val="20190F"/>
-                </a:solidFill>
-                <a:latin typeface="Arial"/>
+                  <a:srgbClr val="1C1C1C"/>
+                </a:solidFill>
+                <a:latin typeface="Trebuchet MS"/>
               </a:rPr>
               <a:t>•  Follow up privately</a:t>
             </a:r>
@@ -10590,11 +10590,11 @@
             <a:avLst/>
           </a:prstGeom>
           <a:solidFill>
-            <a:srgbClr val="FBF6EC"/>
+            <a:srgbClr val="C9A77C"/>
           </a:solidFill>
           <a:ln w="15875">
             <a:solidFill>
-              <a:srgbClr val="E2D8C4"/>
+              <a:srgbClr val="2C6FB7"/>
             </a:solidFill>
           </a:ln>
           <a:effectLst/>
@@ -10651,9 +10651,9 @@
             <a:r>
               <a:rPr sz="1200" b="1">
                 <a:solidFill>
-                  <a:srgbClr val="C07A1E"/>
-                </a:solidFill>
-                <a:latin typeface="Arial"/>
+                  <a:srgbClr val="D2452C"/>
+                </a:solidFill>
+                <a:latin typeface="Trebuchet MS"/>
               </a:rPr>
               <a:t>POSTER ART · T-P22-ART · coming</a:t>
             </a:r>
@@ -10690,9 +10690,9 @@
             <a:r>
               <a:rPr sz="1800" b="1">
                 <a:solidFill>
-                  <a:srgbClr val="1F4D2B"/>
-                </a:solidFill>
-                <a:latin typeface="Georgia"/>
+                  <a:srgbClr val="1C1C1C"/>
+                </a:solidFill>
+                <a:latin typeface="Segoe Print"/>
               </a:rPr>
               <a:t>Artwork for T-P22 · Calm in a difficult moment</a:t>
             </a:r>
@@ -10729,9 +10729,9 @@
             <a:r>
               <a:rPr sz="1100" b="0">
                 <a:solidFill>
-                  <a:srgbClr val="20190F"/>
-                </a:solidFill>
-                <a:latin typeface="Arial"/>
+                  <a:srgbClr val="1C1C1C"/>
+                </a:solidFill>
+                <a:latin typeface="Trebuchet MS"/>
               </a:rPr>
               <a:t>Main scene: a facilitator stands relaxed with open palms, shoulders down, facing a learner who is standing and gesturing angrily; other learners seated watch. Small inset lower right: the same facilitator and learner seated together on a bench with cups of tea, talking quietly, the learner calmer. No weapons, no aggression beyond gesture.</a:t>
             </a:r>
@@ -10752,7 +10752,7 @@
     <p:bg>
       <p:bgPr>
         <a:solidFill>
-          <a:srgbClr val="F7F2E9"/>
+          <a:srgbClr val="C9A77C"/>
         </a:solidFill>
         <a:effectLst/>
       </p:bgPr>
@@ -10794,9 +10794,9 @@
             <a:r>
               <a:rPr sz="1000" b="0">
                 <a:solidFill>
-                  <a:srgbClr val="6B6255"/>
-                </a:solidFill>
-                <a:latin typeface="Arial"/>
+                  <a:srgbClr val="1C1C1C"/>
+                </a:solidFill>
+                <a:latin typeface="Trebuchet MS"/>
               </a:rPr>
               <a:t>T-D4-06   ·   Poster T-P22</a:t>
             </a:r>
@@ -10833,9 +10833,9 @@
             <a:r>
               <a:rPr sz="1000" b="0">
                 <a:solidFill>
-                  <a:srgbClr val="6B6255"/>
-                </a:solidFill>
-                <a:latin typeface="Arial"/>
+                  <a:srgbClr val="1C1C1C"/>
+                </a:solidFill>
+                <a:latin typeface="Trebuchet MS"/>
               </a:rPr>
               <a:t>Teach the Teachers</a:t>
             </a:r>
@@ -10857,7 +10857,7 @@
             <a:avLst/>
           </a:prstGeom>
           <a:solidFill>
-            <a:srgbClr val="C07A1E"/>
+            <a:srgbClr val="D2452C"/>
           </a:solidFill>
           <a:ln>
             <a:noFill/>
@@ -10916,9 +10916,9 @@
             <a:r>
               <a:rPr sz="1400" b="1">
                 <a:solidFill>
-                  <a:srgbClr val="F7F2E9"/>
-                </a:solidFill>
-                <a:latin typeface="Arial"/>
+                  <a:srgbClr val="C9A77C"/>
+                </a:solidFill>
+                <a:latin typeface="Trebuchet MS"/>
               </a:rPr>
               <a:t>YOUR TURN</a:t>
             </a:r>
@@ -10955,9 +10955,9 @@
             <a:r>
               <a:rPr sz="3800" b="1">
                 <a:solidFill>
-                  <a:srgbClr val="1F4D2B"/>
-                </a:solidFill>
-                <a:latin typeface="Georgia"/>
+                  <a:srgbClr val="1C1C1C"/>
+                </a:solidFill>
+                <a:latin typeface="Segoe Print"/>
               </a:rPr>
               <a:t>Role plays in threes</a:t>
             </a:r>
@@ -10979,7 +10979,7 @@
             <a:avLst/>
           </a:prstGeom>
           <a:solidFill>
-            <a:srgbClr val="E2D8C4"/>
+            <a:srgbClr val="2C6FB7"/>
           </a:solidFill>
           <a:ln>
             <a:noFill/>
@@ -11038,9 +11038,9 @@
             <a:r>
               <a:rPr sz="2600" b="1">
                 <a:solidFill>
-                  <a:srgbClr val="20190F"/>
-                </a:solidFill>
-                <a:latin typeface="Arial"/>
+                  <a:srgbClr val="1C1C1C"/>
+                </a:solidFill>
+                <a:latin typeface="Trebuchet MS"/>
               </a:rPr>
               <a:t>•  Facilitator · Learner · Observer</a:t>
             </a:r>
@@ -11054,9 +11054,9 @@
             <a:r>
               <a:rPr sz="2600" b="1">
                 <a:solidFill>
-                  <a:srgbClr val="20190F"/>
-                </a:solidFill>
-                <a:latin typeface="Arial"/>
+                  <a:srgbClr val="1C1C1C"/>
+                </a:solidFill>
+                <a:latin typeface="Trebuchet MS"/>
               </a:rPr>
               <a:t>•  3 minutes play, 3 minutes talk</a:t>
             </a:r>
@@ -11070,9 +11070,9 @@
             <a:r>
               <a:rPr sz="2600" b="1">
                 <a:solidFill>
-                  <a:srgbClr val="20190F"/>
-                </a:solidFill>
-                <a:latin typeface="Arial"/>
+                  <a:srgbClr val="1C1C1C"/>
+                </a:solidFill>
+                <a:latin typeface="Trebuchet MS"/>
               </a:rPr>
               <a:t>•  Rotate three times</a:t>
             </a:r>
@@ -11094,11 +11094,11 @@
             <a:avLst/>
           </a:prstGeom>
           <a:solidFill>
-            <a:srgbClr val="FBF6EC"/>
+            <a:srgbClr val="C9A77C"/>
           </a:solidFill>
           <a:ln w="15875">
             <a:solidFill>
-              <a:srgbClr val="E2D8C4"/>
+              <a:srgbClr val="2C6FB7"/>
             </a:solidFill>
           </a:ln>
           <a:effectLst/>
@@ -11155,9 +11155,9 @@
             <a:r>
               <a:rPr sz="1200" b="1">
                 <a:solidFill>
-                  <a:srgbClr val="C07A1E"/>
-                </a:solidFill>
-                <a:latin typeface="Arial"/>
+                  <a:srgbClr val="D2452C"/>
+                </a:solidFill>
+                <a:latin typeface="Trebuchet MS"/>
               </a:rPr>
               <a:t>IMAGE · T-IMG-10 · coming</a:t>
             </a:r>
@@ -11194,9 +11194,9 @@
             <a:r>
               <a:rPr sz="1800" b="1">
                 <a:solidFill>
-                  <a:srgbClr val="1F4D2B"/>
-                </a:solidFill>
-                <a:latin typeface="Georgia"/>
+                  <a:srgbClr val="1C1C1C"/>
+                </a:solidFill>
+                <a:latin typeface="Segoe Print"/>
               </a:rPr>
               <a:t>Role play in threes</a:t>
             </a:r>
@@ -11233,9 +11233,9 @@
             <a:r>
               <a:rPr sz="1100" b="0">
                 <a:solidFill>
-                  <a:srgbClr val="20190F"/>
-                </a:solidFill>
-                <a:latin typeface="Arial"/>
+                  <a:srgbClr val="1C1C1C"/>
+                </a:solidFill>
+                <a:latin typeface="Trebuchet MS"/>
               </a:rPr>
               <a:t>Three adults standing on a veranda. An older man plays an annoyed learner, arms crossed, frowning (acted, a little comic). A young woman plays the facilitator: relaxed shoulders, open palms, calm face. A third person watches from the side holding a card and smiling. In the background other trios doing the same. Friendly, safe mood.</a:t>
             </a:r>
@@ -11256,7 +11256,7 @@
     <p:bg>
       <p:bgPr>
         <a:solidFill>
-          <a:srgbClr val="1F4D2B"/>
+          <a:srgbClr val="2F3A33"/>
         </a:solidFill>
         <a:effectLst/>
       </p:bgPr>
@@ -11298,9 +11298,9 @@
             <a:r>
               <a:rPr sz="1000" b="0">
                 <a:solidFill>
-                  <a:srgbClr val="A8D88A"/>
-                </a:solidFill>
-                <a:latin typeface="Arial"/>
+                  <a:srgbClr val="F2EFE6"/>
+                </a:solidFill>
+                <a:latin typeface="Trebuchet MS"/>
               </a:rPr>
               <a:t>T-D4-07   ·   Poster F-P16</a:t>
             </a:r>
@@ -11337,9 +11337,9 @@
             <a:r>
               <a:rPr sz="1000" b="0">
                 <a:solidFill>
-                  <a:srgbClr val="A8D88A"/>
-                </a:solidFill>
-                <a:latin typeface="Arial"/>
+                  <a:srgbClr val="F2EFE6"/>
+                </a:solidFill>
+                <a:latin typeface="Trebuchet MS"/>
               </a:rPr>
               <a:t>Teach the Teachers</a:t>
             </a:r>
@@ -11376,9 +11376,9 @@
             <a:r>
               <a:rPr sz="4800" b="1">
                 <a:solidFill>
-                  <a:srgbClr val="F7F2E9"/>
-                </a:solidFill>
-                <a:latin typeface="Georgia"/>
+                  <a:srgbClr val="F2EFE6"/>
+                </a:solidFill>
+                <a:latin typeface="Segoe Print"/>
               </a:rPr>
               <a:t>Model lesson: gallery walk</a:t>
             </a:r>
@@ -11400,7 +11400,7 @@
             <a:avLst/>
           </a:prstGeom>
           <a:solidFill>
-            <a:srgbClr val="C07A1E"/>
+            <a:srgbClr val="D2452C"/>
           </a:solidFill>
           <a:ln>
             <a:noFill/>
@@ -11459,9 +11459,9 @@
             <a:r>
               <a:rPr sz="2400" b="0">
                 <a:solidFill>
-                  <a:srgbClr val="A8D88A"/>
-                </a:solidFill>
-                <a:latin typeface="Arial"/>
+                  <a:srgbClr val="F2EFE6"/>
+                </a:solidFill>
+                <a:latin typeface="Trebuchet MS"/>
               </a:rPr>
               <a:t>Who made these holes?</a:t>
             </a:r>
@@ -11483,11 +11483,11 @@
             <a:avLst/>
           </a:prstGeom>
           <a:solidFill>
-            <a:srgbClr val="FBF6EC"/>
+            <a:srgbClr val="C9A77C"/>
           </a:solidFill>
           <a:ln w="15875">
             <a:solidFill>
-              <a:srgbClr val="E2D8C4"/>
+              <a:srgbClr val="2C6FB7"/>
             </a:solidFill>
           </a:ln>
           <a:effectLst/>
@@ -11544,9 +11544,9 @@
             <a:r>
               <a:rPr sz="1200" b="1">
                 <a:solidFill>
-                  <a:srgbClr val="C07A1E"/>
-                </a:solidFill>
-                <a:latin typeface="Arial"/>
+                  <a:srgbClr val="D2452C"/>
+                </a:solidFill>
+                <a:latin typeface="Trebuchet MS"/>
               </a:rPr>
               <a:t>IMAGE · T-IMG-09 · coming</a:t>
             </a:r>
@@ -11583,9 +11583,9 @@
             <a:r>
               <a:rPr sz="1800" b="1">
                 <a:solidFill>
-                  <a:srgbClr val="1F4D2B"/>
-                </a:solidFill>
-                <a:latin typeface="Georgia"/>
+                  <a:srgbClr val="1C1C1C"/>
+                </a:solidFill>
+                <a:latin typeface="Segoe Print"/>
               </a:rPr>
               <a:t>A gallery walk</a:t>
             </a:r>
@@ -11622,9 +11622,9 @@
             <a:r>
               <a:rPr sz="1100" b="0">
                 <a:solidFill>
-                  <a:srgbClr val="20190F"/>
-                </a:solidFill>
-                <a:latin typeface="Arial"/>
+                  <a:srgbClr val="1C1C1C"/>
+                </a:solidFill>
+                <a:latin typeface="Trebuchet MS"/>
               </a:rPr>
               <a:t>An outdoor space with six stations along a fence and two walls, each with a poster (simple shapes) and a small table of objects: seed trays, string, jars, seed packets, insect picture cards. Four small groups are each busy at a different station — sowing, measuring with string, sorting cards. A facilitator rings a small hand bell near the middle.…</a:t>
             </a:r>
@@ -11645,7 +11645,7 @@
     <p:bg>
       <p:bgPr>
         <a:solidFill>
-          <a:srgbClr val="F7F2E9"/>
+          <a:srgbClr val="C9A77C"/>
         </a:solidFill>
         <a:effectLst/>
       </p:bgPr>
@@ -11687,9 +11687,9 @@
             <a:r>
               <a:rPr sz="1000" b="0">
                 <a:solidFill>
-                  <a:srgbClr val="6B6255"/>
-                </a:solidFill>
-                <a:latin typeface="Arial"/>
+                  <a:srgbClr val="1C1C1C"/>
+                </a:solidFill>
+                <a:latin typeface="Trebuchet MS"/>
               </a:rPr>
               <a:t>T-D4-08   ·   Poster F-P14</a:t>
             </a:r>
@@ -11726,9 +11726,9 @@
             <a:r>
               <a:rPr sz="1000" b="0">
                 <a:solidFill>
-                  <a:srgbClr val="6B6255"/>
-                </a:solidFill>
-                <a:latin typeface="Arial"/>
+                  <a:srgbClr val="1C1C1C"/>
+                </a:solidFill>
+                <a:latin typeface="Trebuchet MS"/>
               </a:rPr>
               <a:t>Teach the Teachers</a:t>
             </a:r>
@@ -11750,7 +11750,7 @@
             <a:avLst/>
           </a:prstGeom>
           <a:solidFill>
-            <a:srgbClr val="C07A1E"/>
+            <a:srgbClr val="D2452C"/>
           </a:solidFill>
           <a:ln>
             <a:noFill/>
@@ -11809,9 +11809,9 @@
             <a:r>
               <a:rPr sz="1400" b="1">
                 <a:solidFill>
-                  <a:srgbClr val="F7F2E9"/>
-                </a:solidFill>
-                <a:latin typeface="Arial"/>
+                  <a:srgbClr val="C9A77C"/>
+                </a:solidFill>
+                <a:latin typeface="Trebuchet MS"/>
               </a:rPr>
               <a:t>YOUR TURN</a:t>
             </a:r>
@@ -11848,9 +11848,9 @@
             <a:r>
               <a:rPr sz="3800" b="1">
                 <a:solidFill>
-                  <a:srgbClr val="1F4D2B"/>
-                </a:solidFill>
-                <a:latin typeface="Georgia"/>
+                  <a:srgbClr val="1C1C1C"/>
+                </a:solidFill>
+                <a:latin typeface="Segoe Print"/>
               </a:rPr>
               <a:t>Six stations</a:t>
             </a:r>
@@ -11872,7 +11872,7 @@
             <a:avLst/>
           </a:prstGeom>
           <a:solidFill>
-            <a:srgbClr val="E2D8C4"/>
+            <a:srgbClr val="2C6FB7"/>
           </a:solidFill>
           <a:ln>
             <a:noFill/>
@@ -11931,9 +11931,9 @@
             <a:r>
               <a:rPr sz="3000" b="1">
                 <a:solidFill>
-                  <a:srgbClr val="20190F"/>
-                </a:solidFill>
-                <a:latin typeface="Arial"/>
+                  <a:srgbClr val="1C1C1C"/>
+                </a:solidFill>
+                <a:latin typeface="Trebuchet MS"/>
               </a:rPr>
               <a:t>•  A job at every station</a:t>
             </a:r>
@@ -11947,9 +11947,9 @@
             <a:r>
               <a:rPr sz="3000" b="1">
                 <a:solidFill>
-                  <a:srgbClr val="20190F"/>
-                </a:solidFill>
-                <a:latin typeface="Arial"/>
+                  <a:srgbClr val="1C1C1C"/>
+                </a:solidFill>
+                <a:latin typeface="Trebuchet MS"/>
               </a:rPr>
               <a:t>•  6 minutes, then move clockwise</a:t>
             </a:r>
@@ -11963,9 +11963,9 @@
             <a:r>
               <a:rPr sz="3000" b="1">
                 <a:solidFill>
-                  <a:srgbClr val="20190F"/>
-                </a:solidFill>
-                <a:latin typeface="Arial"/>
+                  <a:srgbClr val="1C1C1C"/>
+                </a:solidFill>
+                <a:latin typeface="Trebuchet MS"/>
               </a:rPr>
               <a:t>•  Leave your group's mark</a:t>
             </a:r>
@@ -11987,11 +11987,11 @@
             <a:avLst/>
           </a:prstGeom>
           <a:solidFill>
-            <a:srgbClr val="FBF6EC"/>
+            <a:srgbClr val="C9A77C"/>
           </a:solidFill>
           <a:ln w="15875">
             <a:solidFill>
-              <a:srgbClr val="E2D8C4"/>
+              <a:srgbClr val="2C6FB7"/>
             </a:solidFill>
           </a:ln>
           <a:effectLst/>
@@ -12048,9 +12048,9 @@
             <a:r>
               <a:rPr sz="1200" b="1">
                 <a:solidFill>
-                  <a:srgbClr val="C07A1E"/>
-                </a:solidFill>
-                <a:latin typeface="Arial"/>
+                  <a:srgbClr val="D2452C"/>
+                </a:solidFill>
+                <a:latin typeface="Trebuchet MS"/>
               </a:rPr>
               <a:t>IMAGE · T-IMG-09 · coming</a:t>
             </a:r>
@@ -12087,9 +12087,9 @@
             <a:r>
               <a:rPr sz="1800" b="1">
                 <a:solidFill>
-                  <a:srgbClr val="1F4D2B"/>
-                </a:solidFill>
-                <a:latin typeface="Georgia"/>
+                  <a:srgbClr val="1C1C1C"/>
+                </a:solidFill>
+                <a:latin typeface="Segoe Print"/>
               </a:rPr>
               <a:t>A gallery walk</a:t>
             </a:r>
@@ -12126,9 +12126,9 @@
             <a:r>
               <a:rPr sz="1100" b="0">
                 <a:solidFill>
-                  <a:srgbClr val="20190F"/>
-                </a:solidFill>
-                <a:latin typeface="Arial"/>
+                  <a:srgbClr val="1C1C1C"/>
+                </a:solidFill>
+                <a:latin typeface="Trebuchet MS"/>
               </a:rPr>
               <a:t>An outdoor space with six stations along a fence and two walls, each with a poster (simple shapes) and a small table of objects: seed trays, string, jars, seed packets, insect picture cards. Four small groups are each busy at a different station — sowing, measuring with string, sorting cards. A facilitator rings a small hand bell near the middle.…</a:t>
             </a:r>
@@ -12149,7 +12149,7 @@
     <p:bg>
       <p:bgPr>
         <a:solidFill>
-          <a:srgbClr val="F7F2E9"/>
+          <a:srgbClr val="C9A77C"/>
         </a:solidFill>
         <a:effectLst/>
       </p:bgPr>
@@ -12191,9 +12191,9 @@
             <a:r>
               <a:rPr sz="1000" b="0">
                 <a:solidFill>
-                  <a:srgbClr val="6B6255"/>
-                </a:solidFill>
-                <a:latin typeface="Arial"/>
+                  <a:srgbClr val="1C1C1C"/>
+                </a:solidFill>
+                <a:latin typeface="Trebuchet MS"/>
               </a:rPr>
               <a:t>T-D4-09   ·   Poster F-P16</a:t>
             </a:r>
@@ -12230,9 +12230,9 @@
             <a:r>
               <a:rPr sz="1000" b="0">
                 <a:solidFill>
-                  <a:srgbClr val="6B6255"/>
-                </a:solidFill>
-                <a:latin typeface="Arial"/>
+                  <a:srgbClr val="1C1C1C"/>
+                </a:solidFill>
+                <a:latin typeface="Trebuchet MS"/>
               </a:rPr>
               <a:t>Teach the Teachers</a:t>
             </a:r>
@@ -12269,9 +12269,9 @@
             <a:r>
               <a:rPr sz="3800" b="1">
                 <a:solidFill>
-                  <a:srgbClr val="1F4D2B"/>
-                </a:solidFill>
-                <a:latin typeface="Georgia"/>
+                  <a:srgbClr val="1C1C1C"/>
+                </a:solidFill>
+                <a:latin typeface="Segoe Print"/>
               </a:rPr>
               <a:t>Prevent first, spray last</a:t>
             </a:r>
@@ -12293,7 +12293,7 @@
             <a:avLst/>
           </a:prstGeom>
           <a:solidFill>
-            <a:srgbClr val="E2D8C4"/>
+            <a:srgbClr val="2C6FB7"/>
           </a:solidFill>
           <a:ln>
             <a:noFill/>
@@ -12352,9 +12352,9 @@
             <a:r>
               <a:rPr sz="2800" b="0">
                 <a:solidFill>
-                  <a:srgbClr val="20190F"/>
-                </a:solidFill>
-                <a:latin typeface="Arial"/>
+                  <a:srgbClr val="1C1C1C"/>
+                </a:solidFill>
+                <a:latin typeface="Trebuchet MS"/>
               </a:rPr>
               <a:t>•  Healthy soil, mixed plants</a:t>
             </a:r>
@@ -12368,9 +12368,9 @@
             <a:r>
               <a:rPr sz="2800" b="0">
                 <a:solidFill>
-                  <a:srgbClr val="20190F"/>
-                </a:solidFill>
-                <a:latin typeface="Arial"/>
+                  <a:srgbClr val="1C1C1C"/>
+                </a:solidFill>
+                <a:latin typeface="Trebuchet MS"/>
               </a:rPr>
               <a:t>•  Look often, act early</a:t>
             </a:r>
@@ -12384,9 +12384,9 @@
             <a:r>
               <a:rPr sz="2800" b="0">
                 <a:solidFill>
-                  <a:srgbClr val="20190F"/>
-                </a:solidFill>
-                <a:latin typeface="Arial"/>
+                  <a:srgbClr val="1C1C1C"/>
+                </a:solidFill>
+                <a:latin typeface="Trebuchet MS"/>
               </a:rPr>
               <a:t>•  Spray last</a:t>
             </a:r>
@@ -12432,7 +12432,7 @@
             <a:avLst/>
           </a:prstGeom>
           <a:solidFill>
-            <a:srgbClr val="20190F"/>
+            <a:srgbClr val="1C1C1C"/>
           </a:solidFill>
           <a:ln>
             <a:noFill/>
@@ -12491,9 +12491,9 @@
             <a:r>
               <a:rPr sz="1100" b="0">
                 <a:solidFill>
-                  <a:srgbClr val="F7F2E9"/>
-                </a:solidFill>
-                <a:latin typeface="Arial"/>
+                  <a:srgbClr val="C9A77C"/>
+                </a:solidFill>
+                <a:latin typeface="Trebuchet MS"/>
               </a:rPr>
               <a:t>▶  Clip T-ANI-20 · play from the tablet: Imbewu-Guilds-04-Helpful-insects.mp4</a:t>
             </a:r>
